--- a/Update_Slides/FYP_Weekly_Update_Slides_NuMI_Showcase_draft2.pptx
+++ b/Update_Slides/FYP_Weekly_Update_Slides_NuMI_Showcase_draft2.pptx
@@ -219,7 +219,7 @@
           <a:p>
             <a:fld id="{C03BD9BC-DEF3-4382-83D6-5C0A0444C18A}" type="datetimeFigureOut">
               <a:rPr lang="en-SG" smtClean="0"/>
-              <a:t>25/3/2026</a:t>
+              <a:t>2/4/2026</a:t>
             </a:fld>
             <a:endParaRPr lang="en-SG"/>
           </a:p>
@@ -2268,7 +2268,7 @@
           <a:p>
             <a:fld id="{E4F4C623-3743-44FE-BB30-4D680FC21E5F}" type="datetime1">
               <a:rPr lang="en-SG" smtClean="0"/>
-              <a:t>25/3/2026</a:t>
+              <a:t>2/4/2026</a:t>
             </a:fld>
             <a:endParaRPr lang="en-SG"/>
           </a:p>
@@ -2476,7 +2476,7 @@
           <a:p>
             <a:fld id="{DC8A08BD-E832-4BCB-9498-E6B091C19109}" type="datetime1">
               <a:rPr lang="en-SG" smtClean="0"/>
-              <a:t>25/3/2026</a:t>
+              <a:t>2/4/2026</a:t>
             </a:fld>
             <a:endParaRPr lang="en-SG"/>
           </a:p>
@@ -2732,7 +2732,7 @@
           <a:p>
             <a:fld id="{9CB60EA9-F6A6-4AEA-985F-AACEB2270760}" type="datetime1">
               <a:rPr lang="en-SG" smtClean="0"/>
-              <a:t>25/3/2026</a:t>
+              <a:t>2/4/2026</a:t>
             </a:fld>
             <a:endParaRPr lang="en-SG"/>
           </a:p>
@@ -2906,7 +2906,7 @@
           <a:p>
             <a:fld id="{C8B92CC0-9396-4A95-847B-A14B5DA76FDA}" type="datetime1">
               <a:rPr lang="en-SG" smtClean="0"/>
-              <a:t>25/3/2026</a:t>
+              <a:t>2/4/2026</a:t>
             </a:fld>
             <a:endParaRPr lang="en-SG"/>
           </a:p>
@@ -3249,7 +3249,7 @@
           <a:p>
             <a:fld id="{8534868E-9FA3-45B6-9344-676864A44AF2}" type="datetime1">
               <a:rPr lang="en-SG" smtClean="0"/>
-              <a:t>25/3/2026</a:t>
+              <a:t>2/4/2026</a:t>
             </a:fld>
             <a:endParaRPr lang="en-SG"/>
           </a:p>
@@ -3524,7 +3524,7 @@
           <a:p>
             <a:fld id="{4597E219-D9CC-45F7-B320-31161895D8F1}" type="datetime1">
               <a:rPr lang="en-SG" smtClean="0"/>
-              <a:t>25/3/2026</a:t>
+              <a:t>2/4/2026</a:t>
             </a:fld>
             <a:endParaRPr lang="en-SG"/>
           </a:p>
@@ -3903,7 +3903,7 @@
           <a:p>
             <a:fld id="{342A2B4F-3B42-493F-ABF9-3B86C6B4C746}" type="datetime1">
               <a:rPr lang="en-SG" smtClean="0"/>
-              <a:t>25/3/2026</a:t>
+              <a:t>2/4/2026</a:t>
             </a:fld>
             <a:endParaRPr lang="en-SG"/>
           </a:p>
@@ -4021,7 +4021,7 @@
           <a:p>
             <a:fld id="{AEB82DB6-1CC4-41F8-90E0-9F605F9EDFF6}" type="datetime1">
               <a:rPr lang="en-SG" smtClean="0"/>
-              <a:t>25/3/2026</a:t>
+              <a:t>2/4/2026</a:t>
             </a:fld>
             <a:endParaRPr lang="en-SG"/>
           </a:p>
@@ -4136,6 +4136,13 @@
             <a:schemeClr val="lt1"/>
           </a:fontRef>
         </p:style>
+        <p:txBody>
+          <a:bodyPr/>
+          <a:lstStyle/>
+          <a:p>
+            <a:endParaRPr lang="en-SG"/>
+          </a:p>
+        </p:txBody>
       </p:sp>
       <p:sp>
         <p:nvSpPr>
@@ -4174,6 +4181,13 @@
             <a:schemeClr val="lt1"/>
           </a:fontRef>
         </p:style>
+        <p:txBody>
+          <a:bodyPr/>
+          <a:lstStyle/>
+          <a:p>
+            <a:endParaRPr lang="en-SG"/>
+          </a:p>
+        </p:txBody>
       </p:sp>
       <p:sp>
         <p:nvSpPr>
@@ -4192,7 +4206,7 @@
           <a:p>
             <a:fld id="{B19941C0-5AAE-417A-957F-F9240437422A}" type="datetime1">
               <a:rPr lang="en-SG" smtClean="0"/>
-              <a:t>25/3/2026</a:t>
+              <a:t>2/4/2026</a:t>
             </a:fld>
             <a:endParaRPr lang="en-SG"/>
           </a:p>
@@ -4546,7 +4560,7 @@
           <a:p>
             <a:fld id="{CC0B95CB-D201-426D-A26D-E012AF0ECA84}" type="datetime1">
               <a:rPr lang="en-SG" smtClean="0"/>
-              <a:t>25/3/2026</a:t>
+              <a:t>2/4/2026</a:t>
             </a:fld>
             <a:endParaRPr lang="en-SG"/>
           </a:p>
@@ -4928,7 +4942,7 @@
           <a:p>
             <a:fld id="{1917E626-740C-4E7C-A260-9534A8E5421A}" type="datetime1">
               <a:rPr lang="en-SG" smtClean="0"/>
-              <a:t>25/3/2026</a:t>
+              <a:t>2/4/2026</a:t>
             </a:fld>
             <a:endParaRPr lang="en-SG"/>
           </a:p>
@@ -5229,7 +5243,7 @@
           <a:p>
             <a:fld id="{5E6F66B9-CA95-47B7-8675-9CEDFD5B040A}" type="datetime1">
               <a:rPr lang="en-SG" smtClean="0"/>
-              <a:t>25/3/2026</a:t>
+              <a:t>2/4/2026</a:t>
             </a:fld>
             <a:endParaRPr lang="en-SG"/>
           </a:p>
@@ -17290,7 +17304,7 @@
         </p:blipFill>
         <p:spPr>
           <a:xfrm>
-            <a:off x="7929130" y="3289650"/>
+            <a:off x="7929130" y="3298886"/>
             <a:ext cx="3819525" cy="533400"/>
           </a:xfrm>
           <a:prstGeom prst="rect">
